--- a/output/_sample_portfolio.pptx
+++ b/output/_sample_portfolio.pptx
@@ -4621,7 +4621,7 @@
         </p:nvSpPr>
         <p:spPr>
           <a:xfrm>
-            <a:off x="6583680" y="1965960"/>
+            <a:off x="6583680" y="1929384"/>
             <a:ext cx="1188720" cy="320040"/>
           </a:xfrm>
           <a:prstGeom prst="rect">
@@ -4663,7 +4663,7 @@
         </p:nvSpPr>
         <p:spPr>
           <a:xfrm>
-            <a:off x="7772400" y="1965960"/>
+            <a:off x="7772400" y="1929384"/>
             <a:ext cx="3870655" cy="320040"/>
           </a:xfrm>
           <a:prstGeom prst="rect">
@@ -4705,7 +4705,7 @@
         </p:nvSpPr>
         <p:spPr>
           <a:xfrm>
-            <a:off x="6583680" y="2331720"/>
+            <a:off x="6583680" y="2258568"/>
             <a:ext cx="1188720" cy="320040"/>
           </a:xfrm>
           <a:prstGeom prst="rect">
@@ -4747,7 +4747,7 @@
         </p:nvSpPr>
         <p:spPr>
           <a:xfrm>
-            <a:off x="7772400" y="2331720"/>
+            <a:off x="7772400" y="2258568"/>
             <a:ext cx="3870655" cy="320040"/>
           </a:xfrm>
           <a:prstGeom prst="rect">
@@ -4789,12 +4789,12 @@
         </p:nvSpPr>
         <p:spPr>
           <a:xfrm>
-            <a:off x="6583680" y="2880360"/>
-            <a:ext cx="5059375" cy="972312"/>
+            <a:off x="6583680" y="2724912"/>
+            <a:ext cx="5059375" cy="1024128"/>
           </a:xfrm>
           <a:prstGeom prst="roundRect">
             <a:avLst>
-              <a:gd name="adj" fmla="val 11285"/>
+              <a:gd name="adj" fmla="val 10714"/>
             </a:avLst>
           </a:prstGeom>
           <a:solidFill>
@@ -4811,8 +4811,8 @@
         </p:nvSpPr>
         <p:spPr>
           <a:xfrm>
-            <a:off x="6766560" y="2971800"/>
-            <a:ext cx="4693615" cy="320040"/>
+            <a:off x="6766560" y="2779776"/>
+            <a:ext cx="4693615" cy="292608"/>
           </a:xfrm>
           <a:prstGeom prst="rect">
             <a:avLst/>
@@ -4853,8 +4853,8 @@
         </p:nvSpPr>
         <p:spPr>
           <a:xfrm>
-            <a:off x="6766560" y="3291840"/>
-            <a:ext cx="4693615" cy="515112"/>
+            <a:off x="6766560" y="3072384"/>
+            <a:ext cx="4693615" cy="640080"/>
           </a:xfrm>
           <a:prstGeom prst="rect">
             <a:avLst/>
@@ -4868,12 +4868,12 @@
           <a:p>
             <a:pPr algn="l" indent="0" marL="0">
               <a:lnSpc>
-                <a:spcPct val="115000"/>
-              </a:lnSpc>
-              <a:buNone/>
-            </a:pPr>
-            <a:r>
-              <a:rPr lang="en-US" sz="1100" dirty="0">
+                <a:spcPct val="105000"/>
+              </a:lnSpc>
+              <a:buNone/>
+            </a:pPr>
+            <a:r>
+              <a:rPr lang="en-US" sz="1150" dirty="0">
                 <a:solidFill>
                   <a:srgbClr val="191F28"/>
                 </a:solidFill>
@@ -4883,7 +4883,7 @@
               </a:rPr>
               <a:t>Spring Boot REST API, OAuth2/JWT, JPA, 실시간 채팅 및 비동기 처리</a:t>
             </a:r>
-            <a:endParaRPr lang="en-US" sz="1100" dirty="0"/>
+            <a:endParaRPr lang="en-US" sz="1150" dirty="0"/>
           </a:p>
         </p:txBody>
       </p:sp>
@@ -4895,12 +4895,12 @@
         </p:nvSpPr>
         <p:spPr>
           <a:xfrm>
-            <a:off x="6583680" y="3962400"/>
-            <a:ext cx="5059375" cy="972312"/>
+            <a:off x="6583680" y="3858768"/>
+            <a:ext cx="5059375" cy="1024128"/>
           </a:xfrm>
           <a:prstGeom prst="roundRect">
             <a:avLst>
-              <a:gd name="adj" fmla="val 11285"/>
+              <a:gd name="adj" fmla="val 10714"/>
             </a:avLst>
           </a:prstGeom>
           <a:solidFill>
@@ -4917,8 +4917,8 @@
         </p:nvSpPr>
         <p:spPr>
           <a:xfrm>
-            <a:off x="6766560" y="4053840"/>
-            <a:ext cx="4693615" cy="320040"/>
+            <a:off x="6766560" y="3913632"/>
+            <a:ext cx="4693615" cy="292608"/>
           </a:xfrm>
           <a:prstGeom prst="rect">
             <a:avLst/>
@@ -4959,8 +4959,8 @@
         </p:nvSpPr>
         <p:spPr>
           <a:xfrm>
-            <a:off x="6766560" y="4373880"/>
-            <a:ext cx="4693615" cy="515112"/>
+            <a:off x="6766560" y="4206240"/>
+            <a:ext cx="4693615" cy="640080"/>
           </a:xfrm>
           <a:prstGeom prst="rect">
             <a:avLst/>
@@ -4974,12 +4974,12 @@
           <a:p>
             <a:pPr algn="l" indent="0" marL="0">
               <a:lnSpc>
-                <a:spcPct val="115000"/>
-              </a:lnSpc>
-              <a:buNone/>
-            </a:pPr>
-            <a:r>
-              <a:rPr lang="en-US" sz="1100" dirty="0">
+                <a:spcPct val="105000"/>
+              </a:lnSpc>
+              <a:buNone/>
+            </a:pPr>
+            <a:r>
+              <a:rPr lang="en-US" sz="1150" dirty="0">
                 <a:solidFill>
                   <a:srgbClr val="191F28"/>
                 </a:solidFill>
@@ -4989,7 +4989,7 @@
               </a:rPr>
               <a:t>AWS, Kubernetes, Argo CD GitOps, Prometheus·Grafana 관측성</a:t>
             </a:r>
-            <a:endParaRPr lang="en-US" sz="1100" dirty="0"/>
+            <a:endParaRPr lang="en-US" sz="1150" dirty="0"/>
           </a:p>
         </p:txBody>
       </p:sp>
@@ -5001,12 +5001,12 @@
         </p:nvSpPr>
         <p:spPr>
           <a:xfrm>
-            <a:off x="6583680" y="5044440"/>
-            <a:ext cx="5059375" cy="972312"/>
+            <a:off x="6583680" y="4992624"/>
+            <a:ext cx="5059375" cy="1024128"/>
           </a:xfrm>
           <a:prstGeom prst="roundRect">
             <a:avLst>
-              <a:gd name="adj" fmla="val 11285"/>
+              <a:gd name="adj" fmla="val 10714"/>
             </a:avLst>
           </a:prstGeom>
           <a:solidFill>
@@ -5023,8 +5023,8 @@
         </p:nvSpPr>
         <p:spPr>
           <a:xfrm>
-            <a:off x="6766560" y="5135880"/>
-            <a:ext cx="4693615" cy="320040"/>
+            <a:off x="6766560" y="5047488"/>
+            <a:ext cx="4693615" cy="292608"/>
           </a:xfrm>
           <a:prstGeom prst="rect">
             <a:avLst/>
@@ -5065,8 +5065,8 @@
         </p:nvSpPr>
         <p:spPr>
           <a:xfrm>
-            <a:off x="6766560" y="5455920"/>
-            <a:ext cx="4693615" cy="515112"/>
+            <a:off x="6766560" y="5340096"/>
+            <a:ext cx="4693615" cy="640080"/>
           </a:xfrm>
           <a:prstGeom prst="rect">
             <a:avLst/>
@@ -5080,12 +5080,12 @@
           <a:p>
             <a:pPr algn="l" indent="0" marL="0">
               <a:lnSpc>
-                <a:spcPct val="115000"/>
-              </a:lnSpc>
-              <a:buNone/>
-            </a:pPr>
-            <a:r>
-              <a:rPr lang="en-US" sz="1100" dirty="0">
+                <a:spcPct val="105000"/>
+              </a:lnSpc>
+              <a:buNone/>
+            </a:pPr>
+            <a:r>
+              <a:rPr lang="en-US" sz="1150" dirty="0">
                 <a:solidFill>
                   <a:srgbClr val="191F28"/>
                 </a:solidFill>
@@ -5095,7 +5095,7 @@
               </a:rPr>
               <a:t>OCR·VLM 문서 분석, 약관 청킹·임베딩, pgvector 하이브리드 검색</a:t>
             </a:r>
-            <a:endParaRPr lang="en-US" sz="1100" dirty="0"/>
+            <a:endParaRPr lang="en-US" sz="1150" dirty="0"/>
           </a:p>
         </p:txBody>
       </p:sp>
